--- a/aiea/aiea_conference_presentation.pptx
+++ b/aiea/aiea_conference_presentation.pptx
@@ -506,7 +506,7 @@
                 </a:solidFill>
                 <a:latin typeface="Noto Sans CJK SC"/>
               </a:rPr>
-              <a:t>各位老师、各位专家好。我今天汇报的题目是用于高效牙科选择题自动答题的 Choice-Head 蒸馏方法。</a:t>
+              <a:t>各位老师、各位专家好。我今天汇报的题目是用于牙科选择题自动答题的 Choice-Head 蒸馏方法。</a:t>
             </a:r>
           </a:p>
           <a:p>
@@ -4694,7 +4694,7 @@
                 </a:solidFill>
                 <a:latin typeface="Calibri"/>
               </a:rPr>
-              <a:t>Choice-Head Distillation for Efficient Dental MCQ Answering</a:t>
+              <a:t>Choice-Head Distillation for Dental Multiple-Choice Question Answering</a:t>
             </a:r>
           </a:p>
         </p:txBody>
@@ -4898,8 +4898,8 @@
         </p:nvSpPr>
         <p:spPr>
           <a:xfrm>
-            <a:off x="1737360" y="5230368"/>
-            <a:ext cx="2743200" cy="320040"/>
+            <a:off x="1143000" y="5102352"/>
+            <a:ext cx="3474720" cy="292608"/>
           </a:xfrm>
           <a:prstGeom prst="rect">
             <a:avLst/>
@@ -4914,7 +4914,7 @@
           <a:p>
             <a:pPr algn="l"/>
             <a:r>
-              <a:rPr sz="2100" b="1">
+              <a:rPr sz="1800" b="1">
                 <a:solidFill>
                   <a:srgbClr val="FFFFFF"/>
                 </a:solidFill>
@@ -4933,8 +4933,8 @@
         </p:nvSpPr>
         <p:spPr>
           <a:xfrm>
-            <a:off x="6537960" y="5230368"/>
-            <a:ext cx="3108960" cy="320040"/>
+            <a:off x="5623560" y="5102352"/>
+            <a:ext cx="4572000" cy="292608"/>
           </a:xfrm>
           <a:prstGeom prst="rect">
             <a:avLst/>
@@ -4949,13 +4949,13 @@
           <a:p>
             <a:pPr algn="l"/>
             <a:r>
-              <a:rPr sz="2100" b="1">
+              <a:rPr sz="1500" b="1">
                 <a:solidFill>
                   <a:srgbClr val="FFFFFF"/>
                 </a:solidFill>
                 <a:latin typeface="Calibri"/>
               </a:rPr>
-              <a:t>Supervisor: Tichao Xiong</a:t>
+              <a:t>Supervisor: Dr. Richard Tai-Chiu Hsung</a:t>
             </a:r>
           </a:p>
         </p:txBody>
@@ -4968,8 +4968,8 @@
         </p:nvSpPr>
         <p:spPr>
           <a:xfrm>
-            <a:off x="1737360" y="5815584"/>
-            <a:ext cx="3017520" cy="320040"/>
+            <a:off x="1143000" y="5504688"/>
+            <a:ext cx="4114800" cy="292608"/>
           </a:xfrm>
           <a:prstGeom prst="rect">
             <a:avLst/>
@@ -4984,7 +4984,7 @@
           <a:p>
             <a:pPr algn="l"/>
             <a:r>
-              <a:rPr sz="1900" b="1">
+              <a:rPr sz="1600" b="1">
                 <a:solidFill>
                   <a:srgbClr val="FFFFFF"/>
                 </a:solidFill>
@@ -5003,8 +5003,8 @@
         </p:nvSpPr>
         <p:spPr>
           <a:xfrm>
-            <a:off x="6537960" y="5815584"/>
-            <a:ext cx="2651760" cy="320040"/>
+            <a:off x="5623560" y="5504688"/>
+            <a:ext cx="4572000" cy="292608"/>
           </a:xfrm>
           <a:prstGeom prst="rect">
             <a:avLst/>
@@ -5019,12 +5019,82 @@
           <a:p>
             <a:pPr algn="l"/>
             <a:r>
-              <a:rPr sz="1900" b="1">
+              <a:rPr sz="1600" b="1">
                 <a:solidFill>
                   <a:srgbClr val="FFFFFF"/>
                 </a:solidFill>
                 <a:latin typeface="Calibri"/>
               </a:rPr>
+              <a:t>Department: Computer Science</a:t>
+            </a:r>
+          </a:p>
+        </p:txBody>
+      </p:sp>
+      <p:sp>
+        <p:nvSpPr>
+          <p:cNvPr id="13" name="TextBox 12"/>
+          <p:cNvSpPr txBox="1"/>
+          <p:nvPr/>
+        </p:nvSpPr>
+        <p:spPr>
+          <a:xfrm>
+            <a:off x="1143000" y="5907024"/>
+            <a:ext cx="4937760" cy="292608"/>
+          </a:xfrm>
+          <a:prstGeom prst="rect">
+            <a:avLst/>
+          </a:prstGeom>
+          <a:noFill/>
+        </p:spPr>
+        <p:txBody>
+          <a:bodyPr wrap="none" anchor="t">
+            <a:spAutoFit/>
+          </a:bodyPr>
+          <a:lstStyle/>
+          <a:p>
+            <a:pPr algn="l"/>
+            <a:r>
+              <a:rPr sz="1600" b="1">
+                <a:solidFill>
+                  <a:srgbClr val="FFFFFF"/>
+                </a:solidFill>
+                <a:latin typeface="Calibri"/>
+              </a:rPr>
+              <a:t>College: Hong Kong Chu Hai College</a:t>
+            </a:r>
+          </a:p>
+        </p:txBody>
+      </p:sp>
+      <p:sp>
+        <p:nvSpPr>
+          <p:cNvPr id="14" name="TextBox 13"/>
+          <p:cNvSpPr txBox="1"/>
+          <p:nvPr/>
+        </p:nvSpPr>
+        <p:spPr>
+          <a:xfrm>
+            <a:off x="6766560" y="5907024"/>
+            <a:ext cx="2560320" cy="292608"/>
+          </a:xfrm>
+          <a:prstGeom prst="rect">
+            <a:avLst/>
+          </a:prstGeom>
+          <a:noFill/>
+        </p:spPr>
+        <p:txBody>
+          <a:bodyPr wrap="none" anchor="t">
+            <a:spAutoFit/>
+          </a:bodyPr>
+          <a:lstStyle/>
+          <a:p>
+            <a:pPr algn="l"/>
+            <a:r>
+              <a:rPr sz="1600" b="1">
+                <a:solidFill>
+                  <a:srgbClr val="FFFFFF"/>
+                </a:solidFill>
+                <a:latin typeface="Calibri"/>
+              </a:rPr>
               <a:t>AIEA 2026, Shenzhen</a:t>
             </a:r>
           </a:p>
@@ -5032,7 +5102,7 @@
       </p:sp>
       <p:sp>
         <p:nvSpPr>
-          <p:cNvPr id="13" name="Rectangle 12"/>
+          <p:cNvPr id="15" name="Rectangle 14"/>
           <p:cNvSpPr/>
           <p:nvPr/>
         </p:nvSpPr>
@@ -5075,7 +5145,7 @@
       </p:sp>
       <p:sp>
         <p:nvSpPr>
-          <p:cNvPr id="14" name="TextBox 13"/>
+          <p:cNvPr id="16" name="TextBox 15"/>
           <p:cNvSpPr txBox="1"/>
           <p:nvPr/>
         </p:nvSpPr>

--- a/aiea/aiea_conference_presentation.pptx
+++ b/aiea/aiea_conference_presentation.pptx
@@ -5318,7 +5318,7 @@
         <p:spPr>
           <a:xfrm>
             <a:off x="731520" y="1463040"/>
-            <a:ext cx="3063240" cy="1874519"/>
+            <a:ext cx="3063240" cy="2011680"/>
           </a:xfrm>
           <a:prstGeom prst="roundRect">
             <a:avLst/>
@@ -5356,7 +5356,7 @@
               </a:spcAft>
             </a:pPr>
             <a:r>
-              <a:rPr sz="1800" b="1">
+              <a:rPr sz="1700" b="1">
                 <a:solidFill>
                   <a:srgbClr val="DC741A"/>
                 </a:solidFill>
@@ -5372,7 +5372,7 @@
               </a:spcAft>
             </a:pPr>
             <a:r>
-              <a:rPr sz="1300" b="0">
+              <a:rPr sz="1200" b="0">
                 <a:solidFill>
                   <a:srgbClr val="5C5C5C"/>
                 </a:solidFill>
@@ -5388,7 +5388,7 @@
               </a:spcAft>
             </a:pPr>
             <a:r>
-              <a:rPr sz="1300" b="0">
+              <a:rPr sz="1200" b="0">
                 <a:solidFill>
                   <a:srgbClr val="5C5C5C"/>
                 </a:solidFill>
@@ -5404,7 +5404,7 @@
               </a:spcAft>
             </a:pPr>
             <a:r>
-              <a:rPr sz="1300" b="0">
+              <a:rPr sz="1200" b="0">
                 <a:solidFill>
                   <a:srgbClr val="5C5C5C"/>
                 </a:solidFill>
@@ -5424,7 +5424,7 @@
         <p:spPr>
           <a:xfrm>
             <a:off x="3977639" y="1463040"/>
-            <a:ext cx="3063240" cy="1874519"/>
+            <a:ext cx="3063240" cy="2011680"/>
           </a:xfrm>
           <a:prstGeom prst="roundRect">
             <a:avLst/>
@@ -5462,7 +5462,7 @@
               </a:spcAft>
             </a:pPr>
             <a:r>
-              <a:rPr sz="1800" b="1">
+              <a:rPr sz="1700" b="1">
                 <a:solidFill>
                   <a:srgbClr val="1C915D"/>
                 </a:solidFill>
@@ -5478,7 +5478,7 @@
               </a:spcAft>
             </a:pPr>
             <a:r>
-              <a:rPr sz="1300" b="0">
+              <a:rPr sz="1200" b="0">
                 <a:solidFill>
                   <a:srgbClr val="5C5C5C"/>
                 </a:solidFill>
@@ -5494,7 +5494,7 @@
               </a:spcAft>
             </a:pPr>
             <a:r>
-              <a:rPr sz="1300" b="0">
+              <a:rPr sz="1200" b="0">
                 <a:solidFill>
                   <a:srgbClr val="5C5C5C"/>
                 </a:solidFill>
@@ -5510,7 +5510,7 @@
               </a:spcAft>
             </a:pPr>
             <a:r>
-              <a:rPr sz="1300" b="0">
+              <a:rPr sz="1200" b="0">
                 <a:solidFill>
                   <a:srgbClr val="5C5C5C"/>
                 </a:solidFill>
@@ -5530,7 +5530,7 @@
         <p:spPr>
           <a:xfrm>
             <a:off x="7223760" y="1463040"/>
-            <a:ext cx="3063240" cy="1874519"/>
+            <a:ext cx="3063240" cy="2011680"/>
           </a:xfrm>
           <a:prstGeom prst="roundRect">
             <a:avLst/>
@@ -5568,7 +5568,7 @@
               </a:spcAft>
             </a:pPr>
             <a:r>
-              <a:rPr sz="1800" b="1">
+              <a:rPr sz="1700" b="1">
                 <a:solidFill>
                   <a:srgbClr val="1F609C"/>
                 </a:solidFill>
@@ -5584,7 +5584,7 @@
               </a:spcAft>
             </a:pPr>
             <a:r>
-              <a:rPr sz="1300" b="0">
+              <a:rPr sz="1200" b="0">
                 <a:solidFill>
                   <a:srgbClr val="5C5C5C"/>
                 </a:solidFill>
@@ -5600,7 +5600,7 @@
               </a:spcAft>
             </a:pPr>
             <a:r>
-              <a:rPr sz="1300" b="0">
+              <a:rPr sz="1200" b="0">
                 <a:solidFill>
                   <a:srgbClr val="5C5C5C"/>
                 </a:solidFill>
@@ -5616,7 +5616,7 @@
               </a:spcAft>
             </a:pPr>
             <a:r>
-              <a:rPr sz="1300" b="0">
+              <a:rPr sz="1200" b="0">
                 <a:solidFill>
                   <a:srgbClr val="5C5C5C"/>
                 </a:solidFill>
@@ -8476,8 +8476,8 @@
         </p:nvSpPr>
         <p:spPr>
           <a:xfrm>
-            <a:off x="731520" y="1371600"/>
-            <a:ext cx="2148840" cy="1417320"/>
+            <a:off x="731520" y="1298448"/>
+            <a:ext cx="2148840" cy="1627632"/>
           </a:xfrm>
           <a:prstGeom prst="roundRect">
             <a:avLst/>
@@ -8515,7 +8515,7 @@
               </a:spcAft>
             </a:pPr>
             <a:r>
-              <a:rPr sz="1800" b="1">
+              <a:rPr sz="1700" b="1">
                 <a:solidFill>
                   <a:srgbClr val="9B1F23"/>
                 </a:solidFill>
@@ -8531,7 +8531,7 @@
               </a:spcAft>
             </a:pPr>
             <a:r>
-              <a:rPr sz="1300" b="0">
+              <a:rPr sz="1200" b="0">
                 <a:solidFill>
                   <a:srgbClr val="5C5C5C"/>
                 </a:solidFill>
@@ -8547,7 +8547,7 @@
               </a:spcAft>
             </a:pPr>
             <a:r>
-              <a:rPr sz="1300" b="0">
+              <a:rPr sz="1200" b="0">
                 <a:solidFill>
                   <a:srgbClr val="5C5C5C"/>
                 </a:solidFill>
@@ -8563,7 +8563,7 @@
               </a:spcAft>
             </a:pPr>
             <a:r>
-              <a:rPr sz="1300" b="0">
+              <a:rPr sz="1200" b="0">
                 <a:solidFill>
                   <a:srgbClr val="5C5C5C"/>
                 </a:solidFill>
@@ -8582,8 +8582,8 @@
         </p:nvSpPr>
         <p:spPr>
           <a:xfrm>
-            <a:off x="3063240" y="1664208"/>
-            <a:ext cx="1143000" cy="566928"/>
+            <a:off x="3044952" y="1664208"/>
+            <a:ext cx="1170432" cy="566928"/>
           </a:xfrm>
           <a:prstGeom prst="chevron">
             <a:avLst/>
@@ -8634,8 +8634,8 @@
         </p:nvSpPr>
         <p:spPr>
           <a:xfrm>
-            <a:off x="4480560" y="1371600"/>
-            <a:ext cx="2011680" cy="1417320"/>
+            <a:off x="4407408" y="1298448"/>
+            <a:ext cx="2286000" cy="1627632"/>
           </a:xfrm>
           <a:prstGeom prst="roundRect">
             <a:avLst/>
@@ -8673,7 +8673,7 @@
               </a:spcAft>
             </a:pPr>
             <a:r>
-              <a:rPr sz="1800" b="1">
+              <a:rPr sz="1700" b="1">
                 <a:solidFill>
                   <a:srgbClr val="008A96"/>
                 </a:solidFill>
@@ -8689,7 +8689,7 @@
               </a:spcAft>
             </a:pPr>
             <a:r>
-              <a:rPr sz="1300" b="0">
+              <a:rPr sz="1200" b="0">
                 <a:solidFill>
                   <a:srgbClr val="5C5C5C"/>
                 </a:solidFill>
@@ -8705,7 +8705,7 @@
               </a:spcAft>
             </a:pPr>
             <a:r>
-              <a:rPr sz="1300" b="0">
+              <a:rPr sz="1200" b="0">
                 <a:solidFill>
                   <a:srgbClr val="5C5C5C"/>
                 </a:solidFill>
@@ -8721,7 +8721,7 @@
               </a:spcAft>
             </a:pPr>
             <a:r>
-              <a:rPr sz="1300" b="0">
+              <a:rPr sz="1200" b="0">
                 <a:solidFill>
                   <a:srgbClr val="5C5C5C"/>
                 </a:solidFill>
@@ -8740,8 +8740,8 @@
         </p:nvSpPr>
         <p:spPr>
           <a:xfrm>
-            <a:off x="6656832" y="1664208"/>
-            <a:ext cx="1051560" cy="566928"/>
+            <a:off x="6784848" y="1664208"/>
+            <a:ext cx="1005840" cy="566928"/>
           </a:xfrm>
           <a:prstGeom prst="chevron">
             <a:avLst/>
@@ -8792,8 +8792,8 @@
         </p:nvSpPr>
         <p:spPr>
           <a:xfrm>
-            <a:off x="7955279" y="1371600"/>
-            <a:ext cx="2240280" cy="1417320"/>
+            <a:off x="7936992" y="1298448"/>
+            <a:ext cx="2240280" cy="1627632"/>
           </a:xfrm>
           <a:prstGeom prst="roundRect">
             <a:avLst/>
@@ -8831,7 +8831,7 @@
               </a:spcAft>
             </a:pPr>
             <a:r>
-              <a:rPr sz="1800" b="1">
+              <a:rPr sz="1700" b="1">
                 <a:solidFill>
                   <a:srgbClr val="1C915D"/>
                 </a:solidFill>
@@ -8847,7 +8847,7 @@
               </a:spcAft>
             </a:pPr>
             <a:r>
-              <a:rPr sz="1300" b="0">
+              <a:rPr sz="1200" b="0">
                 <a:solidFill>
                   <a:srgbClr val="5C5C5C"/>
                 </a:solidFill>
@@ -8863,7 +8863,7 @@
               </a:spcAft>
             </a:pPr>
             <a:r>
-              <a:rPr sz="1300" b="0">
+              <a:rPr sz="1200" b="0">
                 <a:solidFill>
                   <a:srgbClr val="5C5C5C"/>
                 </a:solidFill>
@@ -8879,7 +8879,7 @@
               </a:spcAft>
             </a:pPr>
             <a:r>
-              <a:rPr sz="1300" b="0">
+              <a:rPr sz="1200" b="0">
                 <a:solidFill>
                   <a:srgbClr val="5C5C5C"/>
                 </a:solidFill>
@@ -8898,8 +8898,8 @@
         </p:nvSpPr>
         <p:spPr>
           <a:xfrm>
-            <a:off x="777240" y="3154680"/>
-            <a:ext cx="5623560" cy="2057400"/>
+            <a:off x="777240" y="3063240"/>
+            <a:ext cx="5623560" cy="2331720"/>
           </a:xfrm>
           <a:prstGeom prst="roundRect">
             <a:avLst/>
@@ -8933,7 +8933,7 @@
           <a:p>
             <a:pPr algn="ctr"/>
             <a:r>
-              <a:rPr sz="2200" b="1">
+              <a:rPr sz="2000" b="1">
                 <a:solidFill>
                   <a:srgbClr val="008A96"/>
                 </a:solidFill>
@@ -8949,7 +8949,7 @@
               </a:spcBef>
             </a:pPr>
             <a:r>
-              <a:rPr sz="2400" b="1">
+              <a:rPr sz="2100" b="1">
                 <a:solidFill>
                   <a:srgbClr val="303030"/>
                 </a:solidFill>
@@ -8965,7 +8965,7 @@
               </a:spcBef>
             </a:pPr>
             <a:r>
-              <a:rPr sz="1500" b="0">
+              <a:rPr sz="1300" b="0">
                 <a:solidFill>
                   <a:srgbClr val="5C5C5C"/>
                 </a:solidFill>
@@ -8981,7 +8981,7 @@
               </a:spcBef>
             </a:pPr>
             <a:r>
-              <a:rPr sz="1400" b="0">
+              <a:rPr sz="1200" b="0">
                 <a:solidFill>
                   <a:srgbClr val="5C5C5C"/>
                 </a:solidFill>
@@ -9000,8 +9000,8 @@
         </p:nvSpPr>
         <p:spPr>
           <a:xfrm>
-            <a:off x="6629400" y="3154680"/>
-            <a:ext cx="3657600" cy="2057400"/>
+            <a:off x="6629400" y="3063240"/>
+            <a:ext cx="3657600" cy="2331720"/>
           </a:xfrm>
           <a:prstGeom prst="roundRect">
             <a:avLst/>
@@ -9035,7 +9035,7 @@
           <a:p>
             <a:pPr algn="ctr"/>
             <a:r>
-              <a:rPr sz="2100" b="1">
+              <a:rPr sz="1800" b="1">
                 <a:solidFill>
                   <a:srgbClr val="1F609C"/>
                 </a:solidFill>
@@ -9046,7 +9046,7 @@
           </a:p>
           <a:p>
             <a:r>
-              <a:rPr sz="1500" b="0">
+              <a:rPr sz="1300" b="0">
                 <a:solidFill>
                   <a:srgbClr val="5C5C5C"/>
                 </a:solidFill>
@@ -9057,7 +9057,7 @@
           </a:p>
           <a:p>
             <a:r>
-              <a:rPr sz="1500" b="0">
+              <a:rPr sz="1300" b="0">
                 <a:solidFill>
                   <a:srgbClr val="5C5C5C"/>
                 </a:solidFill>
@@ -9073,7 +9073,7 @@
               </a:spcBef>
             </a:pPr>
             <a:r>
-              <a:rPr sz="1400" b="1">
+              <a:rPr sz="1200" b="1">
                 <a:solidFill>
                   <a:srgbClr val="1F609C"/>
                 </a:solidFill>
@@ -11151,7 +11151,7 @@
         <p:spPr>
           <a:xfrm>
             <a:off x="822960" y="2834640"/>
-            <a:ext cx="5669280" cy="2423160"/>
+            <a:ext cx="5257800" cy="2423160"/>
           </a:xfrm>
           <a:prstGeom prst="roundRect">
             <a:avLst/>
@@ -11231,7 +11231,7 @@
         <p:spPr>
           <a:xfrm>
             <a:off x="2788920" y="3182112"/>
-            <a:ext cx="3703320" cy="301752"/>
+            <a:ext cx="3291840" cy="301752"/>
           </a:xfrm>
           <a:prstGeom prst="roundRect">
             <a:avLst/>
@@ -11274,7 +11274,7 @@
         <p:spPr>
           <a:xfrm>
             <a:off x="2788920" y="3182112"/>
-            <a:ext cx="2960253" cy="301752"/>
+            <a:ext cx="2631336" cy="301752"/>
           </a:xfrm>
           <a:prstGeom prst="roundRect">
             <a:avLst/>
@@ -11316,7 +11316,7 @@
         </p:nvSpPr>
         <p:spPr>
           <a:xfrm>
-            <a:off x="6565392" y="3163824"/>
+            <a:off x="6153912" y="3163824"/>
             <a:ext cx="685800" cy="228600"/>
           </a:xfrm>
           <a:prstGeom prst="rect">
@@ -11387,7 +11387,7 @@
         <p:spPr>
           <a:xfrm>
             <a:off x="2788920" y="3675888"/>
-            <a:ext cx="3703320" cy="301752"/>
+            <a:ext cx="3291840" cy="301752"/>
           </a:xfrm>
           <a:prstGeom prst="roundRect">
             <a:avLst/>
@@ -11430,7 +11430,7 @@
         <p:spPr>
           <a:xfrm>
             <a:off x="2788920" y="3675888"/>
-            <a:ext cx="1555394" cy="301752"/>
+            <a:ext cx="1382572" cy="301752"/>
           </a:xfrm>
           <a:prstGeom prst="roundRect">
             <a:avLst/>
@@ -11472,7 +11472,7 @@
         </p:nvSpPr>
         <p:spPr>
           <a:xfrm>
-            <a:off x="6565392" y="3657600"/>
+            <a:off x="6153912" y="3657600"/>
             <a:ext cx="685800" cy="228600"/>
           </a:xfrm>
           <a:prstGeom prst="rect">
@@ -11543,7 +11543,7 @@
         <p:spPr>
           <a:xfrm>
             <a:off x="2788920" y="4169664"/>
-            <a:ext cx="3703320" cy="301752"/>
+            <a:ext cx="3291840" cy="301752"/>
           </a:xfrm>
           <a:prstGeom prst="roundRect">
             <a:avLst/>
@@ -11586,7 +11586,7 @@
         <p:spPr>
           <a:xfrm>
             <a:off x="2788920" y="4169664"/>
-            <a:ext cx="3536904" cy="301752"/>
+            <a:ext cx="3143914" cy="301752"/>
           </a:xfrm>
           <a:prstGeom prst="roundRect">
             <a:avLst/>
@@ -11628,7 +11628,7 @@
         </p:nvSpPr>
         <p:spPr>
           <a:xfrm>
-            <a:off x="6565392" y="4151376"/>
+            <a:off x="6153912" y="4151376"/>
             <a:ext cx="685800" cy="228600"/>
           </a:xfrm>
           <a:prstGeom prst="rect">
@@ -11699,7 +11699,7 @@
         <p:spPr>
           <a:xfrm>
             <a:off x="2788920" y="4663440"/>
-            <a:ext cx="3703320" cy="301752"/>
+            <a:ext cx="3291840" cy="301752"/>
           </a:xfrm>
           <a:prstGeom prst="roundRect">
             <a:avLst/>
@@ -11742,7 +11742,7 @@
         <p:spPr>
           <a:xfrm>
             <a:off x="2788920" y="4663440"/>
-            <a:ext cx="3703320" cy="301752"/>
+            <a:ext cx="3291840" cy="301752"/>
           </a:xfrm>
           <a:prstGeom prst="roundRect">
             <a:avLst/>
@@ -11784,7 +11784,7 @@
         </p:nvSpPr>
         <p:spPr>
           <a:xfrm>
-            <a:off x="6565392" y="4645152"/>
+            <a:off x="6153912" y="4645152"/>
             <a:ext cx="685800" cy="228600"/>
           </a:xfrm>
           <a:prstGeom prst="rect">
@@ -11819,8 +11819,8 @@
         </p:nvSpPr>
         <p:spPr>
           <a:xfrm>
-            <a:off x="6720840" y="2834640"/>
-            <a:ext cx="3657600" cy="1554480"/>
+            <a:off x="6355080" y="2816352"/>
+            <a:ext cx="3977639" cy="1783080"/>
           </a:xfrm>
           <a:prstGeom prst="roundRect">
             <a:avLst/>
@@ -11854,7 +11854,7 @@
           <a:p>
             <a:pPr algn="ctr"/>
             <a:r>
-              <a:rPr sz="2100" b="1">
+              <a:rPr sz="1800" b="1">
                 <a:solidFill>
                   <a:srgbClr val="1C915D"/>
                 </a:solidFill>
@@ -11865,35 +11865,35 @@
           </a:p>
           <a:p>
             <a:r>
-              <a:rPr sz="1300" b="0">
+              <a:rPr sz="1000" b="0">
                 <a:solidFill>
                   <a:srgbClr val="5C5C5C"/>
                 </a:solidFill>
                 <a:latin typeface="Calibri"/>
               </a:rPr>
-              <a:t>The distilled student gains 5.12 percentage points over the 14B zero-shot baseline on average.</a:t>
-            </a:r>
-          </a:p>
-          <a:p>
-            <a:r>
-              <a:rPr sz="1300" b="0">
+              <a:t>14B mean gains 5.12 points over the zero-shot baseline.</a:t>
+            </a:r>
+          </a:p>
+          <a:p>
+            <a:r>
+              <a:rPr sz="1000" b="0">
                 <a:solidFill>
                   <a:srgbClr val="5C5C5C"/>
                 </a:solidFill>
                 <a:latin typeface="Calibri"/>
               </a:rPr>
-              <a:t>The best 14B student exceeds the teacher on the same 991-question benchmark.</a:t>
-            </a:r>
-          </a:p>
-          <a:p>
-            <a:r>
-              <a:rPr sz="1300" b="0">
+              <a:t>Best 14B result also exceeds the teacher on the same 991-question benchmark.</a:t>
+            </a:r>
+          </a:p>
+          <a:p>
+            <a:r>
+              <a:rPr sz="1000" b="0">
                 <a:solidFill>
                   <a:srgbClr val="5C5C5C"/>
                 </a:solidFill>
                 <a:latin typeface="Calibri"/>
               </a:rPr>
-              <a:t>The 7B student also improves strongly, so the method is not tied to one model size.</a:t>
+              <a:t>7B also improves strongly, so the method is not tied to one model size.</a:t>
             </a:r>
           </a:p>
         </p:txBody>
@@ -11906,8 +11906,8 @@
         </p:nvSpPr>
         <p:spPr>
           <a:xfrm>
-            <a:off x="6720840" y="4553712"/>
-            <a:ext cx="3657600" cy="868680"/>
+            <a:off x="6355080" y="4681728"/>
+            <a:ext cx="3977639" cy="896112"/>
           </a:xfrm>
           <a:prstGeom prst="roundRect">
             <a:avLst/>
@@ -11941,7 +11941,7 @@
           <a:p>
             <a:pPr algn="ctr"/>
             <a:r>
-              <a:rPr sz="1500" b="1">
+              <a:rPr sz="1300" b="1">
                 <a:solidFill>
                   <a:srgbClr val="DC741A"/>
                 </a:solidFill>
@@ -11952,24 +11952,24 @@
           </a:p>
           <a:p>
             <a:r>
-              <a:rPr sz="1100" b="0">
+              <a:rPr sz="900" b="0">
                 <a:solidFill>
                   <a:srgbClr val="5C5C5C"/>
                 </a:solidFill>
                 <a:latin typeface="Calibri"/>
               </a:rPr>
-              <a:t>Full Test = 991-question main benchmark; Dental Test = 125-question subset.</a:t>
-            </a:r>
-          </a:p>
-          <a:p>
-            <a:r>
-              <a:rPr sz="1100" b="0">
+              <a:t>Full Test = 991-question benchmark; Dental = 125-question subset.</a:t>
+            </a:r>
+          </a:p>
+          <a:p>
+            <a:r>
+              <a:rPr sz="900" b="0">
                 <a:solidFill>
                   <a:srgbClr val="5C5C5C"/>
                 </a:solidFill>
                 <a:latin typeface="Calibri"/>
               </a:rPr>
-              <a:t>Zero-shot = no distillation; Mean = average runs; Best = strongest single run.</a:t>
+              <a:t>Zero-shot = none; Mean = average runs; Best = strongest run.</a:t>
             </a:r>
           </a:p>
         </p:txBody>
@@ -11982,8 +11982,8 @@
         </p:nvSpPr>
         <p:spPr>
           <a:xfrm>
-            <a:off x="7150608" y="5468112"/>
-            <a:ext cx="2743200" cy="402336"/>
+            <a:off x="6720840" y="5650992"/>
+            <a:ext cx="3383280" cy="329184"/>
           </a:xfrm>
           <a:prstGeom prst="roundRect">
             <a:avLst/>
@@ -12017,13 +12017,13 @@
           <a:p>
             <a:pPr algn="ctr"/>
             <a:r>
-              <a:rPr sz="1600" b="1">
+              <a:rPr sz="1400" b="1">
                 <a:solidFill>
                   <a:srgbClr val="FFFFFF"/>
                 </a:solidFill>
                 <a:latin typeface="Calibri"/>
               </a:rPr>
-              <a:t>+1.92 points vs teacher</a:t>
+              <a:t>+1.92 pp vs teacher</a:t>
             </a:r>
           </a:p>
         </p:txBody>
@@ -12326,7 +12326,7 @@
           </a:p>
           <a:p>
             <a:r>
-              <a:rPr sz="1600" b="0">
+              <a:rPr sz="1500" b="0">
                 <a:solidFill>
                   <a:srgbClr val="5C5C5C"/>
                 </a:solidFill>
@@ -12337,7 +12337,7 @@
           </a:p>
           <a:p>
             <a:r>
-              <a:rPr sz="1600" b="0">
+              <a:rPr sz="1500" b="0">
                 <a:solidFill>
                   <a:srgbClr val="5C5C5C"/>
                 </a:solidFill>
@@ -12348,7 +12348,7 @@
           </a:p>
           <a:p>
             <a:r>
-              <a:rPr sz="1600" b="0">
+              <a:rPr sz="1500" b="0">
                 <a:solidFill>
                   <a:srgbClr val="5C5C5C"/>
                 </a:solidFill>
@@ -12413,7 +12413,7 @@
           </a:p>
           <a:p>
             <a:r>
-              <a:rPr sz="1600" b="0">
+              <a:rPr sz="1500" b="0">
                 <a:solidFill>
                   <a:srgbClr val="5C5C5C"/>
                 </a:solidFill>
@@ -12424,7 +12424,7 @@
           </a:p>
           <a:p>
             <a:r>
-              <a:rPr sz="1600" b="0">
+              <a:rPr sz="1500" b="0">
                 <a:solidFill>
                   <a:srgbClr val="5C5C5C"/>
                 </a:solidFill>
@@ -12435,7 +12435,7 @@
           </a:p>
           <a:p>
             <a:r>
-              <a:rPr sz="1600" b="0">
+              <a:rPr sz="1500" b="0">
                 <a:solidFill>
                   <a:srgbClr val="5C5C5C"/>
                 </a:solidFill>

--- a/aiea/aiea_conference_presentation.pptx
+++ b/aiea/aiea_conference_presentation.pptx
@@ -5378,7 +5378,7 @@
                 </a:solidFill>
                 <a:latin typeface="Calibri"/>
               </a:rPr>
-              <a:t>Helpful for some smaller students</a:t>
+              <a:t>Not required for the best 14B result</a:t>
             </a:r>
           </a:p>
           <a:p>
